--- a/submission/Hindsight_Alpha_Deck.pptx
+++ b/submission/Hindsight_Alpha_Deck.pptx
@@ -297,7 +297,7 @@
                 <c:formatCode>General</c:formatCode>
                 <c:ptCount val="5"/>
                 <c:pt idx="0">
-                  <c:v>0.1071</c:v>
+                  <c:v>0.108</c:v>
                 </c:pt>
                 <c:pt idx="1">
                   <c:v>-0.0341</c:v>
@@ -4458,7 +4458,7 @@
                 <a:ea typeface="Cambria" pitchFamily="34" charset="-122"/>
                 <a:cs typeface="Cambria" pitchFamily="34" charset="-120"/>
               </a:rPr>
-              <a:t>442</a:t>
+              <a:t>546</a:t>
             </a:r>
             <a:endParaRPr lang="en-US" sz="3000" dirty="0"/>
           </a:p>
@@ -8997,7 +8997,7 @@
                 <a:ea typeface="Calibri" pitchFamily="34" charset="-122"/>
                 <a:cs typeface="Calibri" pitchFamily="34" charset="-120"/>
               </a:rPr>
-              <a:t>candidate windows lose money — on all three symbols tested (SPY, QQQ, IWM).</a:t>
+              <a:t>candidate windows lose money for SPY — window sensitivity varies by symbol (full detail in the write-up).</a:t>
             </a:r>
             <a:endParaRPr lang="en-US" sz="1080" dirty="0"/>
           </a:p>
@@ -9058,7 +9058,7 @@
                 <a:ea typeface="Cambria" pitchFamily="34" charset="-122"/>
                 <a:cs typeface="Cambria" pitchFamily="34" charset="-120"/>
               </a:rPr>
-              <a:t>53–83%</a:t>
+              <a:t>68.5–82.6%</a:t>
             </a:r>
             <a:endParaRPr lang="en-US" sz="2000" dirty="0"/>
           </a:p>
@@ -9100,7 +9100,7 @@
                 <a:ea typeface="Calibri" pitchFamily="34" charset="-122"/>
                 <a:cs typeface="Calibri" pitchFamily="34" charset="-120"/>
               </a:rPr>
-              <a:t>of each symbol's total gain comes from its 5 best days out of ~110 trades.</a:t>
+              <a:t>of each clean symbol's total gain comes from its 5 best days out of 52–102 trades.</a:t>
             </a:r>
             <a:endParaRPr lang="en-US" sz="1080" dirty="0"/>
           </a:p>
@@ -9161,7 +9161,7 @@
                 <a:ea typeface="Cambria" pitchFamily="34" charset="-122"/>
                 <a:cs typeface="Cambria" pitchFamily="34" charset="-120"/>
               </a:rPr>
-              <a:t>43–54%</a:t>
+              <a:t>45.1–57.1%</a:t>
             </a:r>
             <a:endParaRPr lang="en-US" sz="2000" dirty="0"/>
           </a:p>
@@ -9203,7 +9203,7 @@
                 <a:ea typeface="Calibri" pitchFamily="34" charset="-122"/>
                 <a:cs typeface="Calibri" pitchFamily="34" charset="-120"/>
               </a:rPr>
-              <a:t>win rate on the one window that is positive — most individual trades still lose.</a:t>
+              <a:t>win rate on the 3 symbols that clear hindsight_guard cleanly — most individual trades still lose.</a:t>
             </a:r>
             <a:endParaRPr lang="en-US" sz="1080" dirty="0"/>
           </a:p>
@@ -9264,7 +9264,7 @@
                 <a:ea typeface="Cambria" pitchFamily="34" charset="-122"/>
                 <a:cs typeface="Cambria" pitchFamily="34" charset="-120"/>
               </a:rPr>
-              <a:t>0 leaks</a:t>
+              <a:t>1 leak caught</a:t>
             </a:r>
             <a:endParaRPr lang="en-US" sz="2000" dirty="0"/>
           </a:p>
@@ -9306,7 +9306,7 @@
                 <a:ea typeface="Calibri" pitchFamily="34" charset="-122"/>
                 <a:cs typeface="Calibri" pitchFamily="34" charset="-120"/>
               </a:rPr>
-              <a:t>hindsight_guard: the winning window agrees in-sample on all 3 symbols. No threshold touched after seeing these numbers.</a:t>
+              <a:t>hindsight_guard: XLK's full-history winner (90d) disagrees with its in-sample winner (10d) — refused live, every run. No threshold touched after seeing these numbers.</a:t>
             </a:r>
             <a:endParaRPr lang="en-US" sz="1080" dirty="0"/>
           </a:p>

--- a/submission/Hindsight_Alpha_Deck.pptx
+++ b/submission/Hindsight_Alpha_Deck.pptx
@@ -7644,7 +7644,7 @@
                 <a:ea typeface="Calibri" pitchFamily="34" charset="-122"/>
                 <a:cs typeface="Calibri" pitchFamily="34" charset="-120"/>
               </a:rPr>
-              <a:t>weekly drawdown</a:t>
+              <a:t>drawdown from start</a:t>
             </a:r>
             <a:endParaRPr lang="en-US" sz="1500" dirty="0"/>
           </a:p>
@@ -7686,7 +7686,7 @@
                 <a:ea typeface="Calibri" pitchFamily="34" charset="-122"/>
                 <a:cs typeface="Calibri" pitchFamily="34" charset="-120"/>
               </a:rPr>
-              <a:t>Sticky lock vs. recorded starting equity, persisted in state.json across days — not just within one run.</a:t>
+              <a:t>Sticky lock vs. recorded starting equity, persisted in state.json across days — not just within one run, and there is no week-boundary reset.</a:t>
             </a:r>
             <a:endParaRPr lang="en-US" sz="1250" dirty="0"/>
           </a:p>

--- a/submission/Hindsight_Alpha_Deck.pptx
+++ b/submission/Hindsight_Alpha_Deck.pptx
@@ -9656,7 +9656,7 @@
                 <a:ea typeface="Calibri" pitchFamily="34" charset="-122"/>
                 <a:cs typeface="Calibri" pitchFamily="34" charset="-120"/>
               </a:rPr>
-              <a:t>Strike-selection pagination</a:t>
+              <a:t>The guard's own blind spot</a:t>
             </a:r>
             <a:endParaRPr lang="en-US" sz="1450" dirty="0"/>
           </a:p>
@@ -9698,7 +9698,7 @@
                 <a:ea typeface="Calibri" pitchFamily="34" charset="-122"/>
                 <a:cs typeface="Calibri" pitchFamily="34" charset="-120"/>
               </a:rPr>
-              <a:t>The options-contracts endpoint paged at 100 results by strike ascending. Unbounded, the page for SPY never reached spot — the agent would have refused every trade forever while looking like it was working.</a:t>
+              <a:t>_sharpe() returned 0.0 when it could not measure — a zero indistinguishable from a measured one. On a truncated feed, hindsight_guard certified a selection in which one candidate window had never been scored at all: "winner matches, clears the threshold". A candidate that could not be scored is not a candidate that lost.</a:t>
             </a:r>
             <a:endParaRPr lang="en-US" sz="1200" dirty="0"/>
           </a:p>
@@ -9818,7 +9818,7 @@
                 <a:ea typeface="Calibri" pitchFamily="34" charset="-122"/>
                 <a:cs typeface="Calibri" pitchFamily="34" charset="-120"/>
               </a:rPr>
-              <a:t>State-file corruption</a:t>
+              <a:t>A control that checked strings, not behaviour</a:t>
             </a:r>
             <a:endParaRPr lang="en-US" sz="1450" dirty="0"/>
           </a:p>
@@ -9860,7 +9860,7 @@
                 <a:ea typeface="Calibri" pitchFamily="34" charset="-122"/>
                 <a:cs typeface="Calibri" pitchFamily="34" charset="-120"/>
               </a:rPr>
-              <a:t>A crash mid-write could corrupt state.json. The original recovery silently cleared an active weekly loss lock along with it — the one failure mode that fails on the dangerous side, not the cautious one.</a:t>
+              <a:t>The pre-commit guard for "paper trading only" searched config.py for two words. Deleting the live-trading refusal outright left it green. It now runs the code and reads the answer — a cap that isn't checked in code is a policy, and so is a check that isn't checked.</a:t>
             </a:r>
             <a:endParaRPr lang="en-US" sz="1200" dirty="0"/>
           </a:p>
@@ -9980,7 +9980,7 @@
                 <a:ea typeface="Calibri" pitchFamily="34" charset="-122"/>
                 <a:cs typeface="Calibri" pitchFamily="34" charset="-120"/>
               </a:rPr>
-              <a:t>Exit-loop isolation</a:t>
+              <a:t>A timed-out order counted as failed</a:t>
             </a:r>
             <a:endParaRPr lang="en-US" sz="1450" dirty="0"/>
           </a:p>
@@ -10022,7 +10022,7 @@
                 <a:ea typeface="Calibri" pitchFamily="34" charset="-122"/>
                 <a:cs typeface="Calibri" pitchFamily="34" charset="-120"/>
               </a:rPr>
-              <a:t>Closing one position's failure could block every other position in the same run from being checked — a real losing position could sit open because of an unrelated error.</a:t>
+              <a:t>The CLI call has a 30-second timeout. An order whose answer never came back was treated as not sent: the duplicate-order guard was left unarmed, and the run sized its next trade as if that money were free. A timeout does not mean "failed" — it means "unknown".</a:t>
             </a:r>
             <a:endParaRPr lang="en-US" sz="1200" dirty="0"/>
           </a:p>

--- a/submission/Hindsight_Alpha_Deck.pptx
+++ b/submission/Hindsight_Alpha_Deck.pptx
@@ -3945,7 +3945,7 @@
                 <a:ea typeface="Calibri" pitchFamily="34" charset="-122"/>
                 <a:cs typeface="Calibri" pitchFamily="34" charset="-120"/>
               </a:rPr>
-              <a:t>HINDSIGHT LEAKAGE, IN ONE PICTURE</a:t>
+              <a:t>HINDSIGHT LEAKAGE, IN ONE PICTURE (XLK, MEASURED)</a:t>
             </a:r>
             <a:endParaRPr lang="en-US" sz="1100" dirty="0"/>
           </a:p>
@@ -4045,7 +4045,7 @@
                 <a:ea typeface="Calibri" pitchFamily="34" charset="-122"/>
                 <a:cs typeface="Calibri" pitchFamily="34" charset="-120"/>
               </a:rPr>
-              <a:t>10-day window wins</a:t>
+              <a:t>90-day window wins</a:t>
             </a:r>
             <a:endParaRPr lang="en-US" sz="1300" dirty="0"/>
           </a:p>
@@ -4162,7 +4162,7 @@
                 <a:ea typeface="Calibri" pitchFamily="34" charset="-122"/>
                 <a:cs typeface="Calibri" pitchFamily="34" charset="-120"/>
               </a:rPr>
-              <a:t>30-day window wins instead</a:t>
+              <a:t>10-day window wins instead</a:t>
             </a:r>
             <a:endParaRPr lang="en-US" sz="1300" dirty="0"/>
           </a:p>

--- a/submission/Hindsight_Alpha_Deck.pptx
+++ b/submission/Hindsight_Alpha_Deck.pptx
@@ -4943,7 +4943,7 @@
                 <a:ea typeface="Cambria" pitchFamily="34" charset="-122"/>
                 <a:cs typeface="Cambria" pitchFamily="34" charset="-120"/>
               </a:rPr>
-              <a:t>Five steps, every symbol, every cycle</a:t>
+              <a:t>Five steps, every symbol, every cycle — and no LLM in the loop, by design</a:t>
             </a:r>
             <a:endParaRPr lang="en-US" sz="3200" dirty="0"/>
           </a:p>
@@ -5983,7 +5983,7 @@
                 <a:ea typeface="Calibri" pitchFamily="34" charset="-122"/>
                 <a:cs typeface="Calibri" pitchFamily="34" charset="-120"/>
               </a:rPr>
-              <a:t>A refusal at step 3 or 4 is logged with its reason — the mechanism catching itself is the point, not an edge case to hide.</a:t>
+              <a:t>A refusal at step 3 or 4 is logged with its reason — the mechanism catching itself is the point, not an edge case to hide. An agent is the cycle it runs unattended and the guardrails that can stop it, not the model class inside it; every decision above is reproducible from the log, line by line.</a:t>
             </a:r>
             <a:endParaRPr lang="en-US" sz="1300" dirty="0"/>
           </a:p>

--- a/submission/Hindsight_Alpha_Deck.pptx
+++ b/submission/Hindsight_Alpha_Deck.pptx
@@ -5983,7 +5983,7 @@
                 <a:ea typeface="Calibri" pitchFamily="34" charset="-122"/>
                 <a:cs typeface="Calibri" pitchFamily="34" charset="-120"/>
               </a:rPr>
-              <a:t>A refusal at step 3 or 4 is logged with its reason — the mechanism catching itself is the point, not an edge case to hide. An agent is the cycle it runs unattended and the guardrails that can stop it, not the model class inside it; every decision above is reproducible from the log, line by line.</a:t>
+              <a:t>A refusal at step 3 or 4 is logged with its reason — the mechanism catching itself is the point, not an edge case to hide. An agent is its loop and its guardrails, not the model class inside.</a:t>
             </a:r>
             <a:endParaRPr lang="en-US" sz="1300" dirty="0"/>
           </a:p>

--- a/submission/Hindsight_Alpha_Deck.pptx
+++ b/submission/Hindsight_Alpha_Deck.pptx
@@ -4353,7 +4353,7 @@
                 <a:ea typeface="Calibri" pitchFamily="34" charset="-122"/>
                 <a:cs typeface="Calibri" pitchFamily="34" charset="-120"/>
               </a:rPr>
-              <a:t>WHY THIS ANGLE IS RARE</a:t>
+              <a:t>WHERE THIS SITS IN THE FIELD</a:t>
             </a:r>
             <a:endParaRPr lang="en-US" sz="1200" dirty="0"/>
           </a:p>
@@ -4458,7 +4458,7 @@
                 <a:ea typeface="Cambria" pitchFamily="34" charset="-122"/>
                 <a:cs typeface="Cambria" pitchFamily="34" charset="-120"/>
               </a:rPr>
-              <a:t>546</a:t>
+              <a:t>975</a:t>
             </a:r>
             <a:endParaRPr lang="en-US" sz="3000" dirty="0"/>
           </a:p>
@@ -4500,7 +4500,7 @@
                 <a:ea typeface="Calibri" pitchFamily="34" charset="-122"/>
                 <a:cs typeface="Calibri" pitchFamily="34" charset="-120"/>
               </a:rPr>
-              <a:t>teams registered for this hackathon at time of check — but a prior lablab event with the same format saw only 17% of registered teams reach a final submission.</a:t>
+              <a:t>teams registered on 29 Aug, up from 546 four days earlier. A prior lablab event with the same format saw only 17% of registered teams reach a final submission.</a:t>
             </a:r>
             <a:endParaRPr lang="en-US" sz="1400" dirty="0"/>
           </a:p>
@@ -4566,7 +4566,7 @@
                 <a:ea typeface="Cambria" pitchFamily="34" charset="-122"/>
                 <a:cs typeface="Cambria" pitchFamily="34" charset="-120"/>
               </a:rPr>
-              <a:t>0</a:t>
+              <a:t>9</a:t>
             </a:r>
             <a:endParaRPr lang="en-US" sz="3000" dirty="0"/>
           </a:p>
@@ -4608,7 +4608,7 @@
                 <a:ea typeface="Calibri" pitchFamily="34" charset="-122"/>
                 <a:cs typeface="Calibri" pitchFamily="34" charset="-120"/>
               </a:rPr>
-              <a:t>competing submissions found (across this event and its predecessor) that falsify their own parameter selection before trading — confidence usually comes from an LLM explaining its own decision, not a statistical test.</a:t>
+              <a:t>competing submissions in this track on 29 Aug. The closest, SPY Sentinel AI, validates out-of-sample but locks execution. This agent re-checks its parameter selection before every live decision and trades what passes.</a:t>
             </a:r>
             <a:endParaRPr lang="en-US" sz="1400" dirty="0"/>
           </a:p>

--- a/submission/Hindsight_Alpha_Deck.pptx
+++ b/submission/Hindsight_Alpha_Deck.pptx
@@ -9306,7 +9306,7 @@
                 <a:ea typeface="Calibri" pitchFamily="34" charset="-122"/>
                 <a:cs typeface="Calibri" pitchFamily="34" charset="-120"/>
               </a:rPr>
-              <a:t>hindsight_guard: XLK's full-history winner (90d) disagrees with its in-sample winner (10d) — refused live, every run. No threshold touched after seeing these numbers.</a:t>
+              <a:t>hindsight_guard: XLK's full-history winner (90d) disagrees with its in-sample winner (10d) — refused live, every run. The guard's own false-alarm rate, measured: 23%.</a:t>
             </a:r>
             <a:endParaRPr lang="en-US" sz="1080" dirty="0"/>
           </a:p>

--- a/submission/Hindsight_Alpha_Deck.pptx
+++ b/submission/Hindsight_Alpha_Deck.pptx
@@ -7,7 +7,6 @@
   <p:sldIdLst>
     <p:sldId id="256" r:id="rId2"/>
     <p:sldId id="257" r:id="rId3"/>
-    <p:sldId id="258" r:id="rId4"/>
     <p:sldId id="259" r:id="rId5"/>
     <p:sldId id="260" r:id="rId6"/>
     <p:sldId id="261" r:id="rId7"/>
@@ -2430,16 +2429,16 @@
         <p:spPr>
           <a:xfrm>
             <a:off x="548640" y="411480"/>
-            <a:ext cx="7315200" cy="320040"/>
-          </a:xfrm>
-          <a:prstGeom prst="rect">
-            <a:avLst/>
-          </a:prstGeom>
-          <a:noFill/>
-          <a:ln/>
-        </p:spPr>
-        <p:txBody>
-          <a:bodyPr wrap="square" rtlCol="0" anchor="ctr"/>
+            <a:ext cx="7315200" cy="228600"/>
+          </a:xfrm>
+          <a:prstGeom prst="rect">
+            <a:avLst/>
+          </a:prstGeom>
+          <a:noFill/>
+          <a:ln/>
+        </p:spPr>
+        <p:txBody>
+          <a:bodyPr wrap="square" rtlCol="0" anchor="ctr" tIns="0" bIns="0"/>
           <a:lstStyle/>
           <a:p>
             <a:pPr indent="0" marL="0">
@@ -2468,8 +2467,8 @@
         </p:nvSpPr>
         <p:spPr>
           <a:xfrm>
-            <a:off x="548640" y="685800"/>
-            <a:ext cx="10515600" cy="822960"/>
+            <a:off x="548640" y="742950"/>
+            <a:ext cx="10515600" cy="765810"/>
           </a:xfrm>
           <a:prstGeom prst="rect">
             <a:avLst/>
@@ -3691,16 +3690,16 @@
         <p:spPr>
           <a:xfrm>
             <a:off x="548640" y="411480"/>
-            <a:ext cx="7315200" cy="320040"/>
-          </a:xfrm>
-          <a:prstGeom prst="rect">
-            <a:avLst/>
-          </a:prstGeom>
-          <a:noFill/>
-          <a:ln/>
-        </p:spPr>
-        <p:txBody>
-          <a:bodyPr wrap="square" rtlCol="0" anchor="ctr"/>
+            <a:ext cx="7315200" cy="228600"/>
+          </a:xfrm>
+          <a:prstGeom prst="rect">
+            <a:avLst/>
+          </a:prstGeom>
+          <a:noFill/>
+          <a:ln/>
+        </p:spPr>
+        <p:txBody>
+          <a:bodyPr wrap="square" rtlCol="0" anchor="ctr" tIns="0" bIns="0"/>
           <a:lstStyle/>
           <a:p>
             <a:pPr indent="0" marL="0">
@@ -3729,8 +3728,8 @@
         </p:nvSpPr>
         <p:spPr>
           <a:xfrm>
-            <a:off x="548640" y="685800"/>
-            <a:ext cx="10515600" cy="822960"/>
+            <a:off x="548640" y="742950"/>
+            <a:ext cx="10515600" cy="765810"/>
           </a:xfrm>
           <a:prstGeom prst="rect">
             <a:avLst/>
@@ -3921,7 +3920,7 @@
         <p:spPr>
           <a:xfrm>
             <a:off x="7406640" y="1920240"/>
-            <a:ext cx="3840480" cy="320040"/>
+            <a:ext cx="3840480" cy="438150"/>
           </a:xfrm>
           <a:prstGeom prst="rect">
             <a:avLst/>
@@ -4283,557 +4282,6 @@
                 <a:cs typeface="Calibri" pitchFamily="34" charset="-120"/>
               </a:rPr>
               <a:t>02</a:t>
-            </a:r>
-            <a:endParaRPr lang="en-US" sz="1000" dirty="0"/>
-          </a:p>
-        </p:txBody>
-      </p:sp>
-    </p:spTree>
-  </p:cSld>
-  <p:clrMapOvr>
-    <a:masterClrMapping/>
-  </p:clrMapOvr>
-</p:sld>
-</file>
-
-<file path=ppt/slides/slide3.xml><?xml version="1.0" encoding="utf-8"?>
-<p:sld xmlns:a="http://schemas.openxmlformats.org/drawingml/2006/main" xmlns:r="http://schemas.openxmlformats.org/officeDocument/2006/relationships" xmlns:p="http://schemas.openxmlformats.org/presentationml/2006/main">
-  <p:cSld name="Slide 3">
-    <p:bg>
-      <p:bgPr>
-        <a:solidFill>
-          <a:srgbClr val="FFFFFF"/>
-        </a:solidFill>
-      </p:bgPr>
-    </p:bg>
-    <p:spTree>
-      <p:nvGrpSpPr>
-        <p:cNvPr id="1" name=""/>
-        <p:cNvGrpSpPr/>
-        <p:nvPr/>
-      </p:nvGrpSpPr>
-      <p:grpSpPr>
-        <a:xfrm>
-          <a:off x="0" y="0"/>
-          <a:ext cx="0" cy="0"/>
-          <a:chOff x="0" y="0"/>
-          <a:chExt cx="0" cy="0"/>
-        </a:xfrm>
-      </p:grpSpPr>
-      <p:sp>
-        <p:nvSpPr>
-          <p:cNvPr id="2" name="Text 0"/>
-          <p:cNvSpPr/>
-          <p:nvPr/>
-        </p:nvSpPr>
-        <p:spPr>
-          <a:xfrm>
-            <a:off x="548640" y="411480"/>
-            <a:ext cx="7315200" cy="320040"/>
-          </a:xfrm>
-          <a:prstGeom prst="rect">
-            <a:avLst/>
-          </a:prstGeom>
-          <a:noFill/>
-          <a:ln/>
-        </p:spPr>
-        <p:txBody>
-          <a:bodyPr wrap="square" rtlCol="0" anchor="ctr"/>
-          <a:lstStyle/>
-          <a:p>
-            <a:pPr indent="0" marL="0">
-              <a:buNone/>
-            </a:pPr>
-            <a:r>
-              <a:rPr lang="en-US" sz="1200" b="1" spc="200" kern="0" dirty="0">
-                <a:solidFill>
-                  <a:srgbClr val="0F766E"/>
-                </a:solidFill>
-                <a:latin typeface="Calibri" pitchFamily="34" charset="0"/>
-                <a:ea typeface="Calibri" pitchFamily="34" charset="-122"/>
-                <a:cs typeface="Calibri" pitchFamily="34" charset="-120"/>
-              </a:rPr>
-              <a:t>WHERE THIS SITS IN THE FIELD</a:t>
-            </a:r>
-            <a:endParaRPr lang="en-US" sz="1200" dirty="0"/>
-          </a:p>
-        </p:txBody>
-      </p:sp>
-      <p:sp>
-        <p:nvSpPr>
-          <p:cNvPr id="3" name="Text 1"/>
-          <p:cNvSpPr/>
-          <p:nvPr/>
-        </p:nvSpPr>
-        <p:spPr>
-          <a:xfrm>
-            <a:off x="548640" y="685800"/>
-            <a:ext cx="10515600" cy="822960"/>
-          </a:xfrm>
-          <a:prstGeom prst="rect">
-            <a:avLst/>
-          </a:prstGeom>
-          <a:noFill/>
-          <a:ln/>
-        </p:spPr>
-        <p:txBody>
-          <a:bodyPr wrap="square" rtlCol="0" anchor="ctr"/>
-          <a:lstStyle/>
-          <a:p>
-            <a:pPr algn="l" indent="0" marL="0">
-              <a:buNone/>
-            </a:pPr>
-            <a:r>
-              <a:rPr lang="en-US" sz="3200" b="1" dirty="0">
-                <a:solidFill>
-                  <a:srgbClr val="1E2761"/>
-                </a:solidFill>
-                <a:latin typeface="Cambria" pitchFamily="34" charset="0"/>
-                <a:ea typeface="Cambria" pitchFamily="34" charset="-122"/>
-                <a:cs typeface="Cambria" pitchFamily="34" charset="-120"/>
-              </a:rPr>
-              <a:t>Verified against the field, not assumed</a:t>
-            </a:r>
-            <a:endParaRPr lang="en-US" sz="3200" dirty="0"/>
-          </a:p>
-        </p:txBody>
-      </p:sp>
-      <p:sp>
-        <p:nvSpPr>
-          <p:cNvPr id="4" name="Shape 2"/>
-          <p:cNvSpPr/>
-          <p:nvPr/>
-        </p:nvSpPr>
-        <p:spPr>
-          <a:xfrm>
-            <a:off x="548640" y="1691640"/>
-            <a:ext cx="1417320" cy="1051560"/>
-          </a:xfrm>
-          <a:prstGeom prst="roundRect">
-            <a:avLst>
-              <a:gd name="adj" fmla="val 8696"/>
-            </a:avLst>
-          </a:prstGeom>
-          <a:solidFill>
-            <a:srgbClr val="F4F6FB"/>
-          </a:solidFill>
-          <a:ln w="15875">
-            <a:solidFill>
-              <a:srgbClr val="0F766E"/>
-            </a:solidFill>
-            <a:prstDash val="solid"/>
-          </a:ln>
-        </p:spPr>
-      </p:sp>
-      <p:sp>
-        <p:nvSpPr>
-          <p:cNvPr id="5" name="Text 3"/>
-          <p:cNvSpPr/>
-          <p:nvPr/>
-        </p:nvSpPr>
-        <p:spPr>
-          <a:xfrm>
-            <a:off x="548640" y="1691640"/>
-            <a:ext cx="1417320" cy="1051560"/>
-          </a:xfrm>
-          <a:prstGeom prst="rect">
-            <a:avLst/>
-          </a:prstGeom>
-          <a:noFill/>
-          <a:ln/>
-        </p:spPr>
-        <p:txBody>
-          <a:bodyPr wrap="square" rtlCol="0" anchor="ctr"/>
-          <a:lstStyle/>
-          <a:p>
-            <a:pPr algn="ctr" indent="0" marL="0">
-              <a:buNone/>
-            </a:pPr>
-            <a:r>
-              <a:rPr lang="en-US" sz="3000" b="1" dirty="0">
-                <a:solidFill>
-                  <a:srgbClr val="0F766E"/>
-                </a:solidFill>
-                <a:latin typeface="Cambria" pitchFamily="34" charset="0"/>
-                <a:ea typeface="Cambria" pitchFamily="34" charset="-122"/>
-                <a:cs typeface="Cambria" pitchFamily="34" charset="-120"/>
-              </a:rPr>
-              <a:t>975</a:t>
-            </a:r>
-            <a:endParaRPr lang="en-US" sz="3000" dirty="0"/>
-          </a:p>
-        </p:txBody>
-      </p:sp>
-      <p:sp>
-        <p:nvSpPr>
-          <p:cNvPr id="6" name="Text 4"/>
-          <p:cNvSpPr/>
-          <p:nvPr/>
-        </p:nvSpPr>
-        <p:spPr>
-          <a:xfrm>
-            <a:off x="2194560" y="1764792"/>
-            <a:ext cx="9326880" cy="914400"/>
-          </a:xfrm>
-          <a:prstGeom prst="rect">
-            <a:avLst/>
-          </a:prstGeom>
-          <a:noFill/>
-          <a:ln/>
-        </p:spPr>
-        <p:txBody>
-          <a:bodyPr wrap="square" rtlCol="0" anchor="ctr"/>
-          <a:lstStyle/>
-          <a:p>
-            <a:pPr indent="0" marL="0">
-              <a:lnSpc>
-                <a:spcPct val="115000"/>
-              </a:lnSpc>
-              <a:buNone/>
-            </a:pPr>
-            <a:r>
-              <a:rPr lang="en-US" sz="1400" dirty="0">
-                <a:solidFill>
-                  <a:srgbClr val="1F2937"/>
-                </a:solidFill>
-                <a:latin typeface="Calibri" pitchFamily="34" charset="0"/>
-                <a:ea typeface="Calibri" pitchFamily="34" charset="-122"/>
-                <a:cs typeface="Calibri" pitchFamily="34" charset="-120"/>
-              </a:rPr>
-              <a:t>teams registered on 29 Aug, up from 546 four days earlier. A prior lablab event with the same format saw only 17% of registered teams reach a final submission.</a:t>
-            </a:r>
-            <a:endParaRPr lang="en-US" sz="1400" dirty="0"/>
-          </a:p>
-        </p:txBody>
-      </p:sp>
-      <p:sp>
-        <p:nvSpPr>
-          <p:cNvPr id="7" name="Shape 5"/>
-          <p:cNvSpPr/>
-          <p:nvPr/>
-        </p:nvSpPr>
-        <p:spPr>
-          <a:xfrm>
-            <a:off x="548640" y="3017520"/>
-            <a:ext cx="1417320" cy="1051560"/>
-          </a:xfrm>
-          <a:prstGeom prst="roundRect">
-            <a:avLst>
-              <a:gd name="adj" fmla="val 8696"/>
-            </a:avLst>
-          </a:prstGeom>
-          <a:solidFill>
-            <a:srgbClr val="F4F6FB"/>
-          </a:solidFill>
-          <a:ln w="15875">
-            <a:solidFill>
-              <a:srgbClr val="0F766E"/>
-            </a:solidFill>
-            <a:prstDash val="solid"/>
-          </a:ln>
-        </p:spPr>
-      </p:sp>
-      <p:sp>
-        <p:nvSpPr>
-          <p:cNvPr id="8" name="Text 6"/>
-          <p:cNvSpPr/>
-          <p:nvPr/>
-        </p:nvSpPr>
-        <p:spPr>
-          <a:xfrm>
-            <a:off x="548640" y="3017520"/>
-            <a:ext cx="1417320" cy="1051560"/>
-          </a:xfrm>
-          <a:prstGeom prst="rect">
-            <a:avLst/>
-          </a:prstGeom>
-          <a:noFill/>
-          <a:ln/>
-        </p:spPr>
-        <p:txBody>
-          <a:bodyPr wrap="square" rtlCol="0" anchor="ctr"/>
-          <a:lstStyle/>
-          <a:p>
-            <a:pPr algn="ctr" indent="0" marL="0">
-              <a:buNone/>
-            </a:pPr>
-            <a:r>
-              <a:rPr lang="en-US" sz="3000" b="1" dirty="0">
-                <a:solidFill>
-                  <a:srgbClr val="0F766E"/>
-                </a:solidFill>
-                <a:latin typeface="Cambria" pitchFamily="34" charset="0"/>
-                <a:ea typeface="Cambria" pitchFamily="34" charset="-122"/>
-                <a:cs typeface="Cambria" pitchFamily="34" charset="-120"/>
-              </a:rPr>
-              <a:t>9</a:t>
-            </a:r>
-            <a:endParaRPr lang="en-US" sz="3000" dirty="0"/>
-          </a:p>
-        </p:txBody>
-      </p:sp>
-      <p:sp>
-        <p:nvSpPr>
-          <p:cNvPr id="9" name="Text 7"/>
-          <p:cNvSpPr/>
-          <p:nvPr/>
-        </p:nvSpPr>
-        <p:spPr>
-          <a:xfrm>
-            <a:off x="2194560" y="3090672"/>
-            <a:ext cx="9326880" cy="914400"/>
-          </a:xfrm>
-          <a:prstGeom prst="rect">
-            <a:avLst/>
-          </a:prstGeom>
-          <a:noFill/>
-          <a:ln/>
-        </p:spPr>
-        <p:txBody>
-          <a:bodyPr wrap="square" rtlCol="0" anchor="ctr"/>
-          <a:lstStyle/>
-          <a:p>
-            <a:pPr indent="0" marL="0">
-              <a:lnSpc>
-                <a:spcPct val="115000"/>
-              </a:lnSpc>
-              <a:buNone/>
-            </a:pPr>
-            <a:r>
-              <a:rPr lang="en-US" sz="1400" dirty="0">
-                <a:solidFill>
-                  <a:srgbClr val="1F2937"/>
-                </a:solidFill>
-                <a:latin typeface="Calibri" pitchFamily="34" charset="0"/>
-                <a:ea typeface="Calibri" pitchFamily="34" charset="-122"/>
-                <a:cs typeface="Calibri" pitchFamily="34" charset="-120"/>
-              </a:rPr>
-              <a:t>competing submissions in this track on 29 Aug. The closest, SPY Sentinel AI, validates out-of-sample but locks execution. This agent re-checks its parameter selection before every live decision and trades what passes.</a:t>
-            </a:r>
-            <a:endParaRPr lang="en-US" sz="1400" dirty="0"/>
-          </a:p>
-        </p:txBody>
-      </p:sp>
-      <p:sp>
-        <p:nvSpPr>
-          <p:cNvPr id="10" name="Shape 8"/>
-          <p:cNvSpPr/>
-          <p:nvPr/>
-        </p:nvSpPr>
-        <p:spPr>
-          <a:xfrm>
-            <a:off x="548640" y="4343400"/>
-            <a:ext cx="1417320" cy="1051560"/>
-          </a:xfrm>
-          <a:prstGeom prst="roundRect">
-            <a:avLst>
-              <a:gd name="adj" fmla="val 8696"/>
-            </a:avLst>
-          </a:prstGeom>
-          <a:solidFill>
-            <a:srgbClr val="F4F6FB"/>
-          </a:solidFill>
-          <a:ln w="15875">
-            <a:solidFill>
-              <a:srgbClr val="0F766E"/>
-            </a:solidFill>
-            <a:prstDash val="solid"/>
-          </a:ln>
-        </p:spPr>
-      </p:sp>
-      <p:sp>
-        <p:nvSpPr>
-          <p:cNvPr id="11" name="Text 9"/>
-          <p:cNvSpPr/>
-          <p:nvPr/>
-        </p:nvSpPr>
-        <p:spPr>
-          <a:xfrm>
-            <a:off x="548640" y="4343400"/>
-            <a:ext cx="1417320" cy="1051560"/>
-          </a:xfrm>
-          <a:prstGeom prst="rect">
-            <a:avLst/>
-          </a:prstGeom>
-          <a:noFill/>
-          <a:ln/>
-        </p:spPr>
-        <p:txBody>
-          <a:bodyPr wrap="square" rtlCol="0" anchor="ctr"/>
-          <a:lstStyle/>
-          <a:p>
-            <a:pPr algn="ctr" indent="0" marL="0">
-              <a:buNone/>
-            </a:pPr>
-            <a:r>
-              <a:rPr lang="en-US" sz="3000" b="1" dirty="0">
-                <a:solidFill>
-                  <a:srgbClr val="0F766E"/>
-                </a:solidFill>
-                <a:latin typeface="Cambria" pitchFamily="34" charset="0"/>
-                <a:ea typeface="Cambria" pitchFamily="34" charset="-122"/>
-                <a:cs typeface="Cambria" pitchFamily="34" charset="-120"/>
-              </a:rPr>
-              <a:t>3×</a:t>
-            </a:r>
-            <a:endParaRPr lang="en-US" sz="3000" dirty="0"/>
-          </a:p>
-        </p:txBody>
-      </p:sp>
-      <p:sp>
-        <p:nvSpPr>
-          <p:cNvPr id="12" name="Text 10"/>
-          <p:cNvSpPr/>
-          <p:nvPr/>
-        </p:nvSpPr>
-        <p:spPr>
-          <a:xfrm>
-            <a:off x="2194560" y="4416552"/>
-            <a:ext cx="9326880" cy="914400"/>
-          </a:xfrm>
-          <a:prstGeom prst="rect">
-            <a:avLst/>
-          </a:prstGeom>
-          <a:noFill/>
-          <a:ln/>
-        </p:spPr>
-        <p:txBody>
-          <a:bodyPr wrap="square" rtlCol="0" anchor="ctr"/>
-          <a:lstStyle/>
-          <a:p>
-            <a:pPr indent="0" marL="0">
-              <a:lnSpc>
-                <a:spcPct val="115000"/>
-              </a:lnSpc>
-              <a:buNone/>
-            </a:pPr>
-            <a:r>
-              <a:rPr lang="en-US" sz="1400" dirty="0">
-                <a:solidFill>
-                  <a:srgbClr val="1F2937"/>
-                </a:solidFill>
-                <a:latin typeface="Calibri" pitchFamily="34" charset="0"/>
-                <a:ea typeface="Calibri" pitchFamily="34" charset="-122"/>
-                <a:cs typeface="Calibri" pitchFamily="34" charset="-120"/>
-              </a:rPr>
-              <a:t>independent refusal gates stacked before any order: hindsight check → volatility regime → portfolio risk gates — not one signal dressed up as three.</a:t>
-            </a:r>
-            <a:endParaRPr lang="en-US" sz="1400" dirty="0"/>
-          </a:p>
-        </p:txBody>
-      </p:sp>
-      <p:sp>
-        <p:nvSpPr>
-          <p:cNvPr id="13" name="Text 11"/>
-          <p:cNvSpPr/>
-          <p:nvPr/>
-        </p:nvSpPr>
-        <p:spPr>
-          <a:xfrm>
-            <a:off x="548640" y="5806440"/>
-            <a:ext cx="10972800" cy="640080"/>
-          </a:xfrm>
-          <a:prstGeom prst="rect">
-            <a:avLst/>
-          </a:prstGeom>
-          <a:noFill/>
-          <a:ln/>
-        </p:spPr>
-        <p:txBody>
-          <a:bodyPr wrap="square" rtlCol="0" anchor="ctr"/>
-          <a:lstStyle/>
-          <a:p>
-            <a:pPr indent="0" marL="0">
-              <a:buNone/>
-            </a:pPr>
-            <a:r>
-              <a:rPr lang="en-US" sz="1250" i="1" dirty="0">
-                <a:solidFill>
-                  <a:srgbClr val="6B7280"/>
-                </a:solidFill>
-                <a:latin typeface="Calibri" pitchFamily="34" charset="0"/>
-                <a:ea typeface="Calibri" pitchFamily="34" charset="-122"/>
-                <a:cs typeface="Calibri" pitchFamily="34" charset="-120"/>
-              </a:rPr>
-              <a:t>A community-voted top submission from the predecessor event was a plain feature list with no strategy detail — presentation and demo clarity matter as much as depth. This deck and the write-up lead with honesty about results, not a headline number.</a:t>
-            </a:r>
-            <a:endParaRPr lang="en-US" sz="1250" dirty="0"/>
-          </a:p>
-        </p:txBody>
-      </p:sp>
-      <p:sp>
-        <p:nvSpPr>
-          <p:cNvPr id="14" name="Text 12"/>
-          <p:cNvSpPr/>
-          <p:nvPr/>
-        </p:nvSpPr>
-        <p:spPr>
-          <a:xfrm>
-            <a:off x="548640" y="6446520"/>
-            <a:ext cx="5486400" cy="320040"/>
-          </a:xfrm>
-          <a:prstGeom prst="rect">
-            <a:avLst/>
-          </a:prstGeom>
-          <a:noFill/>
-          <a:ln/>
-        </p:spPr>
-        <p:txBody>
-          <a:bodyPr wrap="square" rtlCol="0" anchor="ctr"/>
-          <a:lstStyle/>
-          <a:p>
-            <a:pPr indent="0" marL="0">
-              <a:buNone/>
-            </a:pPr>
-            <a:r>
-              <a:rPr lang="en-US" sz="1000" dirty="0">
-                <a:solidFill>
-                  <a:srgbClr val="6B7280"/>
-                </a:solidFill>
-                <a:latin typeface="Calibri" pitchFamily="34" charset="0"/>
-                <a:ea typeface="Calibri" pitchFamily="34" charset="-122"/>
-                <a:cs typeface="Calibri" pitchFamily="34" charset="-120"/>
-              </a:rPr>
-              <a:t>Hindsight Alpha  ·  Alpaca AI Trading Agents Hackathon</a:t>
-            </a:r>
-            <a:endParaRPr lang="en-US" sz="1000" dirty="0"/>
-          </a:p>
-        </p:txBody>
-      </p:sp>
-      <p:sp>
-        <p:nvSpPr>
-          <p:cNvPr id="15" name="Text 13"/>
-          <p:cNvSpPr/>
-          <p:nvPr/>
-        </p:nvSpPr>
-        <p:spPr>
-          <a:xfrm>
-            <a:off x="11475720" y="6446520"/>
-            <a:ext cx="548640" cy="320040"/>
-          </a:xfrm>
-          <a:prstGeom prst="rect">
-            <a:avLst/>
-          </a:prstGeom>
-          <a:noFill/>
-          <a:ln/>
-        </p:spPr>
-        <p:txBody>
-          <a:bodyPr wrap="square" rtlCol="0" anchor="ctr"/>
-          <a:lstStyle/>
-          <a:p>
-            <a:pPr algn="r" indent="0" marL="0">
-              <a:buNone/>
-            </a:pPr>
-            <a:r>
-              <a:rPr lang="en-US" sz="1000" dirty="0">
-                <a:solidFill>
-                  <a:srgbClr val="6B7280"/>
-                </a:solidFill>
-                <a:latin typeface="Calibri" pitchFamily="34" charset="0"/>
-                <a:ea typeface="Calibri" pitchFamily="34" charset="-122"/>
-                <a:cs typeface="Calibri" pitchFamily="34" charset="-120"/>
-              </a:rPr>
-              <a:t>03</a:t>
             </a:r>
             <a:endParaRPr lang="en-US" sz="1000" dirty="0"/>
           </a:p>
@@ -4880,16 +4328,16 @@
         <p:spPr>
           <a:xfrm>
             <a:off x="548640" y="411480"/>
-            <a:ext cx="7315200" cy="320040"/>
-          </a:xfrm>
-          <a:prstGeom prst="rect">
-            <a:avLst/>
-          </a:prstGeom>
-          <a:noFill/>
-          <a:ln/>
-        </p:spPr>
-        <p:txBody>
-          <a:bodyPr wrap="square" rtlCol="0" anchor="ctr"/>
+            <a:ext cx="7315200" cy="228600"/>
+          </a:xfrm>
+          <a:prstGeom prst="rect">
+            <a:avLst/>
+          </a:prstGeom>
+          <a:noFill/>
+          <a:ln/>
+        </p:spPr>
+        <p:txBody>
+          <a:bodyPr wrap="square" rtlCol="0" anchor="ctr" tIns="0" bIns="0"/>
           <a:lstStyle/>
           <a:p>
             <a:pPr indent="0" marL="0">
@@ -6108,16 +5556,16 @@
         <p:spPr>
           <a:xfrm>
             <a:off x="548640" y="411480"/>
-            <a:ext cx="7315200" cy="320040"/>
-          </a:xfrm>
-          <a:prstGeom prst="rect">
-            <a:avLst/>
-          </a:prstGeom>
-          <a:noFill/>
-          <a:ln/>
-        </p:spPr>
-        <p:txBody>
-          <a:bodyPr wrap="square" rtlCol="0" anchor="ctr"/>
+            <a:ext cx="7315200" cy="228600"/>
+          </a:xfrm>
+          <a:prstGeom prst="rect">
+            <a:avLst/>
+          </a:prstGeom>
+          <a:noFill/>
+          <a:ln/>
+        </p:spPr>
+        <p:txBody>
+          <a:bodyPr wrap="square" rtlCol="0" anchor="ctr" tIns="0" bIns="0"/>
           <a:lstStyle/>
           <a:p>
             <a:pPr indent="0" marL="0">
@@ -6146,8 +5594,8 @@
         </p:nvSpPr>
         <p:spPr>
           <a:xfrm>
-            <a:off x="548640" y="685800"/>
-            <a:ext cx="10515600" cy="822960"/>
+            <a:off x="548640" y="742950"/>
+            <a:ext cx="10515600" cy="765810"/>
           </a:xfrm>
           <a:prstGeom prst="rect">
             <a:avLst/>
@@ -6975,16 +6423,16 @@
         <p:spPr>
           <a:xfrm>
             <a:off x="548640" y="411480"/>
-            <a:ext cx="7315200" cy="320040"/>
-          </a:xfrm>
-          <a:prstGeom prst="rect">
-            <a:avLst/>
-          </a:prstGeom>
-          <a:noFill/>
-          <a:ln/>
-        </p:spPr>
-        <p:txBody>
-          <a:bodyPr wrap="square" rtlCol="0" anchor="ctr"/>
+            <a:ext cx="7315200" cy="228600"/>
+          </a:xfrm>
+          <a:prstGeom prst="rect">
+            <a:avLst/>
+          </a:prstGeom>
+          <a:noFill/>
+          <a:ln/>
+        </p:spPr>
+        <p:txBody>
+          <a:bodyPr wrap="square" rtlCol="0" anchor="ctr" tIns="0" bIns="0"/>
           <a:lstStyle/>
           <a:p>
             <a:pPr indent="0" marL="0">
@@ -7013,8 +6461,8 @@
         </p:nvSpPr>
         <p:spPr>
           <a:xfrm>
-            <a:off x="548640" y="685800"/>
-            <a:ext cx="10515600" cy="822960"/>
+            <a:off x="548640" y="742950"/>
+            <a:ext cx="10515600" cy="765810"/>
           </a:xfrm>
           <a:prstGeom prst="rect">
             <a:avLst/>
@@ -7104,7 +6552,7 @@
           <a:ln/>
         </p:spPr>
         <p:txBody>
-          <a:bodyPr wrap="square" rtlCol="0" anchor="ctr"/>
+          <a:bodyPr wrap="square" rtlCol="0" anchor="ctr" lIns="0" rIns="0"/>
           <a:lstStyle/>
           <a:p>
             <a:pPr algn="ctr" indent="0" marL="0">
@@ -7266,7 +6714,7 @@
           <a:ln/>
         </p:spPr>
         <p:txBody>
-          <a:bodyPr wrap="square" rtlCol="0" anchor="ctr"/>
+          <a:bodyPr wrap="square" rtlCol="0" anchor="ctr" lIns="0" rIns="0"/>
           <a:lstStyle/>
           <a:p>
             <a:pPr algn="ctr" indent="0" marL="0">
@@ -7428,7 +6876,7 @@
           <a:ln/>
         </p:spPr>
         <p:txBody>
-          <a:bodyPr wrap="square" rtlCol="0" anchor="ctr"/>
+          <a:bodyPr wrap="square" rtlCol="0" anchor="ctr" lIns="0" rIns="0"/>
           <a:lstStyle/>
           <a:p>
             <a:pPr algn="ctr" indent="0" marL="0">
@@ -7590,7 +7038,7 @@
           <a:ln/>
         </p:spPr>
         <p:txBody>
-          <a:bodyPr wrap="square" rtlCol="0" anchor="ctr"/>
+          <a:bodyPr wrap="square" rtlCol="0" anchor="ctr" lIns="0" rIns="0"/>
           <a:lstStyle/>
           <a:p>
             <a:pPr algn="ctr" indent="0" marL="0">
@@ -7850,16 +7298,16 @@
         <p:spPr>
           <a:xfrm>
             <a:off x="548640" y="411480"/>
-            <a:ext cx="7315200" cy="320040"/>
-          </a:xfrm>
-          <a:prstGeom prst="rect">
-            <a:avLst/>
-          </a:prstGeom>
-          <a:noFill/>
-          <a:ln/>
-        </p:spPr>
-        <p:txBody>
-          <a:bodyPr wrap="square" rtlCol="0" anchor="ctr"/>
+            <a:ext cx="7315200" cy="228600"/>
+          </a:xfrm>
+          <a:prstGeom prst="rect">
+            <a:avLst/>
+          </a:prstGeom>
+          <a:noFill/>
+          <a:ln/>
+        </p:spPr>
+        <p:txBody>
+          <a:bodyPr wrap="square" rtlCol="0" anchor="ctr" tIns="0" bIns="0"/>
           <a:lstStyle/>
           <a:p>
             <a:pPr indent="0" marL="0">
@@ -7888,8 +7336,8 @@
         </p:nvSpPr>
         <p:spPr>
           <a:xfrm>
-            <a:off x="548640" y="685800"/>
-            <a:ext cx="10515600" cy="822960"/>
+            <a:off x="548640" y="742950"/>
+            <a:ext cx="10515600" cy="765810"/>
           </a:xfrm>
           <a:prstGeom prst="rect">
             <a:avLst/>
@@ -8815,16 +8263,16 @@
         <p:spPr>
           <a:xfrm>
             <a:off x="548640" y="411480"/>
-            <a:ext cx="7315200" cy="320040"/>
-          </a:xfrm>
-          <a:prstGeom prst="rect">
-            <a:avLst/>
-          </a:prstGeom>
-          <a:noFill/>
-          <a:ln/>
-        </p:spPr>
-        <p:txBody>
-          <a:bodyPr wrap="square" rtlCol="0" anchor="ctr"/>
+            <a:ext cx="7315200" cy="228600"/>
+          </a:xfrm>
+          <a:prstGeom prst="rect">
+            <a:avLst/>
+          </a:prstGeom>
+          <a:noFill/>
+          <a:ln/>
+        </p:spPr>
+        <p:txBody>
+          <a:bodyPr wrap="square" rtlCol="0" anchor="ctr" tIns="0" bIns="0"/>
           <a:lstStyle/>
           <a:p>
             <a:pPr indent="0" marL="0">
@@ -8853,8 +8301,8 @@
         </p:nvSpPr>
         <p:spPr>
           <a:xfrm>
-            <a:off x="548640" y="685800"/>
-            <a:ext cx="10515600" cy="822960"/>
+            <a:off x="548640" y="742950"/>
+            <a:ext cx="10515600" cy="765810"/>
           </a:xfrm>
           <a:prstGeom prst="rect">
             <a:avLst/>
@@ -8940,7 +8388,7 @@
           <a:ln/>
         </p:spPr>
         <p:txBody>
-          <a:bodyPr wrap="square" rtlCol="0" anchor="ctr"/>
+          <a:bodyPr wrap="square" rtlCol="0" anchor="ctr" lIns="0" rIns="0" tIns="0" bIns="0"/>
           <a:lstStyle/>
           <a:p>
             <a:pPr indent="0" marL="0">
@@ -8979,7 +8427,7 @@
           <a:ln/>
         </p:spPr>
         <p:txBody>
-          <a:bodyPr wrap="square" rtlCol="0" anchor="ctr"/>
+          <a:bodyPr wrap="square" rtlCol="0" anchor="ctr" tIns="0" bIns="0"/>
           <a:lstStyle/>
           <a:p>
             <a:pPr indent="0" marL="0">
@@ -9043,7 +8491,7 @@
           <a:ln/>
         </p:spPr>
         <p:txBody>
-          <a:bodyPr wrap="square" rtlCol="0" anchor="ctr"/>
+          <a:bodyPr wrap="square" rtlCol="0" anchor="ctr" lIns="0" rIns="0" tIns="0" bIns="0"/>
           <a:lstStyle/>
           <a:p>
             <a:pPr indent="0" marL="0">
@@ -9082,7 +8530,7 @@
           <a:ln/>
         </p:spPr>
         <p:txBody>
-          <a:bodyPr wrap="square" rtlCol="0" anchor="ctr"/>
+          <a:bodyPr wrap="square" rtlCol="0" anchor="ctr" tIns="0" bIns="0"/>
           <a:lstStyle/>
           <a:p>
             <a:pPr indent="0" marL="0">
@@ -9146,7 +8594,7 @@
           <a:ln/>
         </p:spPr>
         <p:txBody>
-          <a:bodyPr wrap="square" rtlCol="0" anchor="ctr"/>
+          <a:bodyPr wrap="square" rtlCol="0" anchor="ctr" lIns="0" rIns="0" tIns="0" bIns="0"/>
           <a:lstStyle/>
           <a:p>
             <a:pPr indent="0" marL="0">
@@ -9185,7 +8633,7 @@
           <a:ln/>
         </p:spPr>
         <p:txBody>
-          <a:bodyPr wrap="square" rtlCol="0" anchor="ctr"/>
+          <a:bodyPr wrap="square" rtlCol="0" anchor="ctr" tIns="0" bIns="0"/>
           <a:lstStyle/>
           <a:p>
             <a:pPr indent="0" marL="0">
@@ -9249,7 +8697,7 @@
           <a:ln/>
         </p:spPr>
         <p:txBody>
-          <a:bodyPr wrap="square" rtlCol="0" anchor="ctr"/>
+          <a:bodyPr wrap="square" rtlCol="0" anchor="ctr" lIns="0" rIns="0" tIns="0" bIns="0"/>
           <a:lstStyle/>
           <a:p>
             <a:pPr indent="0" marL="0">
@@ -9288,7 +8736,7 @@
           <a:ln/>
         </p:spPr>
         <p:txBody>
-          <a:bodyPr wrap="square" rtlCol="0" anchor="ctr"/>
+          <a:bodyPr wrap="square" rtlCol="0" anchor="ctr" tIns="0" bIns="0"/>
           <a:lstStyle/>
           <a:p>
             <a:pPr indent="0" marL="0">
@@ -9473,16 +8921,16 @@
         <p:spPr>
           <a:xfrm>
             <a:off x="548640" y="411480"/>
-            <a:ext cx="7315200" cy="320040"/>
-          </a:xfrm>
-          <a:prstGeom prst="rect">
-            <a:avLst/>
-          </a:prstGeom>
-          <a:noFill/>
-          <a:ln/>
-        </p:spPr>
-        <p:txBody>
-          <a:bodyPr wrap="square" rtlCol="0" anchor="ctr"/>
+            <a:ext cx="7315200" cy="228600"/>
+          </a:xfrm>
+          <a:prstGeom prst="rect">
+            <a:avLst/>
+          </a:prstGeom>
+          <a:noFill/>
+          <a:ln/>
+        </p:spPr>
+        <p:txBody>
+          <a:bodyPr wrap="square" rtlCol="0" anchor="ctr" tIns="0" bIns="0"/>
           <a:lstStyle/>
           <a:p>
             <a:pPr indent="0" marL="0">
@@ -9511,8 +8959,8 @@
         </p:nvSpPr>
         <p:spPr>
           <a:xfrm>
-            <a:off x="548640" y="685800"/>
-            <a:ext cx="10515600" cy="822960"/>
+            <a:off x="548640" y="742950"/>
+            <a:ext cx="10515600" cy="765810"/>
           </a:xfrm>
           <a:prstGeom prst="rect">
             <a:avLst/>

--- a/submission/Hindsight_Alpha_Deck.pptx
+++ b/submission/Hindsight_Alpha_Deck.pptx
@@ -2467,8 +2467,8 @@
         </p:nvSpPr>
         <p:spPr>
           <a:xfrm>
-            <a:off x="548640" y="742950"/>
-            <a:ext cx="10515600" cy="765810"/>
+            <a:off x="548640" y="838200"/>
+            <a:ext cx="10515600" cy="666750"/>
           </a:xfrm>
           <a:prstGeom prst="rect">
             <a:avLst/>
@@ -3728,8 +3728,8 @@
         </p:nvSpPr>
         <p:spPr>
           <a:xfrm>
-            <a:off x="548640" y="742950"/>
-            <a:ext cx="10515600" cy="765810"/>
+            <a:off x="548640" y="838200"/>
+            <a:ext cx="10515600" cy="666750"/>
           </a:xfrm>
           <a:prstGeom prst="rect">
             <a:avLst/>
@@ -4366,8 +4366,8 @@
         </p:nvSpPr>
         <p:spPr>
           <a:xfrm>
-            <a:off x="548640" y="685800"/>
-            <a:ext cx="10515600" cy="822960"/>
+            <a:off x="548640" y="838200"/>
+            <a:ext cx="11109960" cy="666750"/>
           </a:xfrm>
           <a:prstGeom prst="rect">
             <a:avLst/>
@@ -4391,7 +4391,7 @@
                 <a:ea typeface="Cambria" pitchFamily="34" charset="-122"/>
                 <a:cs typeface="Cambria" pitchFamily="34" charset="-120"/>
               </a:rPr>
-              <a:t>Five steps, every symbol, every cycle — and no LLM in the loop, by design</a:t>
+              <a:t>Five steps, every symbol, every cycle — no LLM</a:t>
             </a:r>
             <a:endParaRPr lang="en-US" sz="3200" dirty="0"/>
           </a:p>
@@ -5594,8 +5594,8 @@
         </p:nvSpPr>
         <p:spPr>
           <a:xfrm>
-            <a:off x="548640" y="742950"/>
-            <a:ext cx="10515600" cy="765810"/>
+            <a:off x="548640" y="838200"/>
+            <a:ext cx="10515600" cy="666750"/>
           </a:xfrm>
           <a:prstGeom prst="rect">
             <a:avLst/>
@@ -6461,8 +6461,8 @@
         </p:nvSpPr>
         <p:spPr>
           <a:xfrm>
-            <a:off x="548640" y="742950"/>
-            <a:ext cx="10515600" cy="765810"/>
+            <a:off x="548640" y="838200"/>
+            <a:ext cx="10515600" cy="666750"/>
           </a:xfrm>
           <a:prstGeom prst="rect">
             <a:avLst/>
@@ -7336,8 +7336,8 @@
         </p:nvSpPr>
         <p:spPr>
           <a:xfrm>
-            <a:off x="548640" y="742950"/>
-            <a:ext cx="10515600" cy="765810"/>
+            <a:off x="548640" y="838200"/>
+            <a:ext cx="10515600" cy="666750"/>
           </a:xfrm>
           <a:prstGeom prst="rect">
             <a:avLst/>
@@ -8301,8 +8301,8 @@
         </p:nvSpPr>
         <p:spPr>
           <a:xfrm>
-            <a:off x="548640" y="742950"/>
-            <a:ext cx="10515600" cy="765810"/>
+            <a:off x="548640" y="838200"/>
+            <a:ext cx="10515600" cy="666750"/>
           </a:xfrm>
           <a:prstGeom prst="rect">
             <a:avLst/>
@@ -8959,8 +8959,8 @@
         </p:nvSpPr>
         <p:spPr>
           <a:xfrm>
-            <a:off x="548640" y="742950"/>
-            <a:ext cx="10515600" cy="765810"/>
+            <a:off x="548640" y="838200"/>
+            <a:ext cx="10515600" cy="666750"/>
           </a:xfrm>
           <a:prstGeom prst="rect">
             <a:avLst/>

--- a/submission/Hindsight_Alpha_Deck.pptx
+++ b/submission/Hindsight_Alpha_Deck.pptx
@@ -1142,94 +1142,6 @@
             <a:fld id="{F7021451-1387-4CA6-816F-3879F97B5CBC}" type="slidenum">
               <a:rPr lang="en-US"/>
               <a:t>2</a:t>
-            </a:fld>
-            <a:endParaRPr lang="en-US"/>
-          </a:p>
-        </p:txBody>
-      </p:sp>
-    </p:spTree>
-    <p:extLst>
-      <p:ext uri="{BB962C8B-B14F-4D97-AF65-F5344CB8AC3E}">
-        <p14:creationId xmlns:p14="http://schemas.microsoft.com/office/powerpoint/2010/main" val="1024086991"/>
-      </p:ext>
-    </p:extLst>
-  </p:cSld>
-  <p:clrMapOvr>
-    <a:masterClrMapping/>
-  </p:clrMapOvr>
-</p:notes>
-</file>
-
-<file path=ppt/notesSlides/notesSlide3.xml><?xml version="1.0" encoding="utf-8"?>
-<p:notes xmlns:a="http://schemas.openxmlformats.org/drawingml/2006/main" xmlns:r="http://schemas.openxmlformats.org/officeDocument/2006/relationships" xmlns:p="http://schemas.openxmlformats.org/presentationml/2006/main">
-  <p:cSld>
-    <p:spTree>
-      <p:nvGrpSpPr>
-        <p:cNvPr id="1" name=""/>
-        <p:cNvGrpSpPr/>
-        <p:nvPr/>
-      </p:nvGrpSpPr>
-      <p:grpSpPr>
-        <a:xfrm>
-          <a:off x="0" y="0"/>
-          <a:ext cx="0" cy="0"/>
-          <a:chOff x="0" y="0"/>
-          <a:chExt cx="0" cy="0"/>
-        </a:xfrm>
-      </p:grpSpPr>
-      <p:sp>
-        <p:nvSpPr>
-          <p:cNvPr id="2" name="Slide Image Placeholder 1"/>
-          <p:cNvSpPr>
-            <a:spLocks noGrp="1" noRot="1" noChangeAspect="1"/>
-          </p:cNvSpPr>
-          <p:nvPr>
-            <p:ph type="sldImg"/>
-          </p:nvPr>
-        </p:nvSpPr>
-        <p:spPr/>
-      </p:sp>
-      <p:sp>
-        <p:nvSpPr>
-          <p:cNvPr id="3" name="Notes Placeholder 2"/>
-          <p:cNvSpPr>
-            <a:spLocks noGrp="1"/>
-          </p:cNvSpPr>
-          <p:nvPr>
-            <p:ph type="body" idx="1"/>
-          </p:nvPr>
-        </p:nvSpPr>
-        <p:spPr/>
-        <p:txBody>
-          <a:bodyPr/>
-          <a:lstStyle/>
-          <a:p>
-            <a:r>
-              <a:rPr lang="en-US" dirty="0"/>
-              <a:t/>
-            </a:r>
-            <a:endParaRPr lang="en-US" dirty="0"/>
-          </a:p>
-        </p:txBody>
-      </p:sp>
-      <p:sp>
-        <p:nvSpPr>
-          <p:cNvPr id="4" name="Slide Number Placeholder 3"/>
-          <p:cNvSpPr>
-            <a:spLocks noGrp="1"/>
-          </p:cNvSpPr>
-          <p:nvPr>
-            <p:ph type="sldNum" sz="quarter" idx="10"/>
-          </p:nvPr>
-        </p:nvSpPr>
-        <p:spPr/>
-        <p:txBody>
-          <a:bodyPr/>
-          <a:lstStyle/>
-          <a:p>
-            <a:fld id="{F7021451-1387-4CA6-816F-3879F97B5CBC}" type="slidenum">
-              <a:rPr lang="en-US"/>
-              <a:t>3</a:t>
             </a:fld>
             <a:endParaRPr lang="en-US"/>
           </a:p>

--- a/submission/Hindsight_Alpha_Deck.pptx
+++ b/submission/Hindsight_Alpha_Deck.pptx
@@ -8666,7 +8666,7 @@
                 <a:ea typeface="Calibri" pitchFamily="34" charset="-122"/>
                 <a:cs typeface="Calibri" pitchFamily="34" charset="-120"/>
               </a:rPr>
-              <a:t>hindsight_guard: XLK's full-history winner (90d) disagrees with its in-sample winner (10d) — refused live, every run. The guard's own false-alarm rate, measured: 23%.</a:t>
+              <a:t>hindsight_guard: XLK's full-history winner (90d) disagrees with its in-sample winner (10d) — refused live, every run. The guard's own false-alarm rate, measured two ways: 22.6% and 30.2%.</a:t>
             </a:r>
             <a:endParaRPr lang="en-US" sz="1080" dirty="0"/>
           </a:p>
